--- a/presentation/CNN_Image_Classification_Presentation.pptx
+++ b/presentation/CNN_Image_Classification_Presentation.pptx
@@ -897,7 +897,7 @@
             </a:pPr>
             <a:r>
               <a:rPr lang="es-ES" dirty="0"/>
-              <a:t>Done - Santi</a:t>
+              <a:t> - Santi</a:t>
             </a:r>
           </a:p>
           <a:p>
@@ -4527,13 +4527,21 @@
             <p:ph type="title"/>
           </p:nvPr>
         </p:nvSpPr>
-        <p:spPr/>
+        <p:spPr>
+          <a:xfrm>
+            <a:off x="457200" y="612342"/>
+            <a:ext cx="8229600" cy="1143000"/>
+          </a:xfrm>
+        </p:spPr>
         <p:txBody>
           <a:bodyPr>
             <a:normAutofit fontScale="90000"/>
           </a:bodyPr>
           <a:lstStyle/>
           <a:p>
+            <a:br>
+              <a:rPr lang="es-ES" dirty="0"/>
+            </a:br>
             <a:r>
               <a:rPr lang="es-ES" dirty="0" err="1"/>
               <a:t>Image</a:t>
@@ -4583,33 +4591,34 @@
             <p:ph idx="1"/>
           </p:nvPr>
         </p:nvSpPr>
-        <p:spPr/>
+        <p:spPr>
+          <a:xfrm>
+            <a:off x="457200" y="2441863"/>
+            <a:ext cx="8229600" cy="3886921"/>
+          </a:xfrm>
+        </p:spPr>
         <p:txBody>
           <a:bodyPr>
             <a:normAutofit/>
           </a:bodyPr>
           <a:lstStyle/>
           <a:p>
+            <a:pPr marL="0" indent="0">
+              <a:buNone/>
+            </a:pPr>
             <a:r>
               <a:rPr lang="en-US" sz="2400" dirty="0" err="1"/>
               <a:t>IronHack</a:t>
             </a:r>
             <a:r>
               <a:rPr lang="en-US" sz="2400" dirty="0"/>
-              <a:t> AI Engineering Bootcamp – Jan 2026</a:t>
-            </a:r>
-          </a:p>
-          <a:p>
-            <a:r>
-              <a:rPr lang="en-US" sz="2400" dirty="0"/>
-              <a:t>Group 1</a:t>
-            </a:r>
-          </a:p>
-          <a:p>
-            <a:r>
-              <a:rPr sz="2400" dirty="0"/>
-              <a:t>Team members: </a:t>
-            </a:r>
+              <a:t> AI Engineering Bootcamp – Jan 2026 Group 1</a:t>
+            </a:r>
+          </a:p>
+          <a:p>
+            <a:pPr marL="0" indent="0">
+              <a:buNone/>
+            </a:pPr>
             <a:r>
               <a:rPr lang="es-ES" sz="2400" dirty="0"/>
               <a:t>Bianca </a:t>
@@ -4620,11 +4629,7 @@
             </a:r>
             <a:r>
               <a:rPr lang="es-ES" sz="2400" dirty="0"/>
-              <a:t>, Ben Hunt, Rodrigo Torralba, Santiago </a:t>
-            </a:r>
-            <a:r>
-              <a:rPr lang="es-ES" sz="2400" dirty="0" err="1"/>
-              <a:t>Baron</a:t>
+              <a:t>, Ben Hunt, Rodrigo Torralba, Santiago Barón</a:t>
             </a:r>
             <a:endParaRPr sz="2400" dirty="0"/>
           </a:p>
@@ -5210,60 +5215,6 @@
       </p:sp>
       <p:sp>
         <p:nvSpPr>
-          <p:cNvPr id="3" name="Content Placeholder 2"/>
-          <p:cNvSpPr>
-            <a:spLocks noGrp="1"/>
-          </p:cNvSpPr>
-          <p:nvPr>
-            <p:ph idx="1"/>
-          </p:nvPr>
-        </p:nvSpPr>
-        <p:spPr/>
-        <p:txBody>
-          <a:bodyPr>
-            <a:normAutofit/>
-          </a:bodyPr>
-          <a:lstStyle/>
-          <a:p>
-            <a:pPr marL="0" indent="0">
-              <a:buNone/>
-            </a:pPr>
-            <a:r>
-              <a:rPr lang="en-US" sz="2400" dirty="0"/>
-              <a:t>VGG type architecture model</a:t>
-            </a:r>
-          </a:p>
-          <a:p>
-            <a:pPr marL="0" indent="0">
-              <a:buNone/>
-            </a:pPr>
-            <a:r>
-              <a:rPr lang="en-US" sz="2400" dirty="0"/>
-              <a:t>Test accuracy: 85%</a:t>
-            </a:r>
-          </a:p>
-          <a:p>
-            <a:pPr marL="0" indent="0">
-              <a:buNone/>
-            </a:pPr>
-            <a:r>
-              <a:rPr lang="en-US" sz="2400" dirty="0"/>
-              <a:t>(image)</a:t>
-            </a:r>
-          </a:p>
-          <a:p>
-            <a:pPr marL="0" indent="0">
-              <a:buNone/>
-            </a:pPr>
-            <a:endParaRPr lang="en-US" sz="2400" dirty="0"/>
-          </a:p>
-          <a:p>
-            <a:endParaRPr lang="en-US" dirty="0"/>
-          </a:p>
-        </p:txBody>
-      </p:sp>
-      <p:sp>
-        <p:nvSpPr>
           <p:cNvPr id="4" name="TextBox 3"/>
           <p:cNvSpPr txBox="1"/>
           <p:nvPr/>
@@ -5290,6 +5241,138 @@
           </a:p>
         </p:txBody>
       </p:sp>
+      <p:pic>
+        <p:nvPicPr>
+          <p:cNvPr id="5" name="Imagen 4" descr="Diagrama, Tabla&#10;&#10;El contenido generado por IA puede ser incorrecto.">
+            <a:extLst>
+              <a:ext uri="{FF2B5EF4-FFF2-40B4-BE49-F238E27FC236}">
+                <a16:creationId xmlns:a16="http://schemas.microsoft.com/office/drawing/2014/main" id="{0434CE38-2892-EBB7-39E2-C02B4C3CF970}"/>
+              </a:ext>
+            </a:extLst>
+          </p:cNvPr>
+          <p:cNvPicPr>
+            <a:picLocks noChangeAspect="1"/>
+          </p:cNvPicPr>
+          <p:nvPr/>
+        </p:nvPicPr>
+        <p:blipFill>
+          <a:blip r:embed="rId3"/>
+          <a:stretch>
+            <a:fillRect/>
+          </a:stretch>
+        </p:blipFill>
+        <p:spPr>
+          <a:xfrm>
+            <a:off x="393700" y="2698365"/>
+            <a:ext cx="4433861" cy="2955907"/>
+          </a:xfrm>
+          <a:prstGeom prst="rect">
+            <a:avLst/>
+          </a:prstGeom>
+        </p:spPr>
+      </p:pic>
+      <p:sp>
+        <p:nvSpPr>
+          <p:cNvPr id="3" name="Content Placeholder 2"/>
+          <p:cNvSpPr>
+            <a:spLocks noGrp="1"/>
+          </p:cNvSpPr>
+          <p:nvPr>
+            <p:ph idx="1"/>
+          </p:nvPr>
+        </p:nvSpPr>
+        <p:spPr/>
+        <p:txBody>
+          <a:bodyPr>
+            <a:normAutofit/>
+          </a:bodyPr>
+          <a:lstStyle/>
+          <a:p>
+            <a:pPr marL="0" indent="0">
+              <a:buNone/>
+            </a:pPr>
+            <a:r>
+              <a:rPr lang="en-US" sz="1600" dirty="0"/>
+              <a:t>VGG type architecture model</a:t>
+            </a:r>
+          </a:p>
+          <a:p>
+            <a:pPr marL="0" indent="0">
+              <a:buNone/>
+            </a:pPr>
+            <a:r>
+              <a:rPr lang="en-US" sz="1600" dirty="0"/>
+              <a:t>	85% accuracy. 300k params. 0,5 loss.      </a:t>
+            </a:r>
+          </a:p>
+          <a:p>
+            <a:pPr marL="0" indent="0">
+              <a:buNone/>
+            </a:pPr>
+            <a:r>
+              <a:rPr lang="en-US" sz="1600" dirty="0"/>
+              <a:t>Deployment </a:t>
+            </a:r>
+          </a:p>
+          <a:p>
+            <a:pPr marL="0" indent="0">
+              <a:buNone/>
+            </a:pPr>
+            <a:r>
+              <a:rPr lang="en-US" sz="1600" dirty="0"/>
+              <a:t>Transfer learning</a:t>
+            </a:r>
+          </a:p>
+          <a:p>
+            <a:pPr marL="0" indent="0">
+              <a:buNone/>
+            </a:pPr>
+            <a:r>
+              <a:rPr lang="en-US" sz="1600" dirty="0"/>
+              <a:t>Other architectures</a:t>
+            </a:r>
+          </a:p>
+          <a:p>
+            <a:pPr marL="0" indent="0">
+              <a:buNone/>
+            </a:pPr>
+            <a:endParaRPr lang="en-US" sz="2400" dirty="0"/>
+          </a:p>
+          <a:p>
+            <a:endParaRPr lang="en-US" dirty="0"/>
+          </a:p>
+        </p:txBody>
+      </p:sp>
+      <p:pic>
+        <p:nvPicPr>
+          <p:cNvPr id="6" name="Imagen 5" descr="Interfaz de usuario gráfica, Aplicación&#10;&#10;El contenido generado por IA puede ser incorrecto.">
+            <a:extLst>
+              <a:ext uri="{FF2B5EF4-FFF2-40B4-BE49-F238E27FC236}">
+                <a16:creationId xmlns:a16="http://schemas.microsoft.com/office/drawing/2014/main" id="{E71852E4-28F1-FECF-FA65-16A215C63082}"/>
+              </a:ext>
+            </a:extLst>
+          </p:cNvPr>
+          <p:cNvPicPr>
+            <a:picLocks noChangeAspect="1"/>
+          </p:cNvPicPr>
+          <p:nvPr/>
+        </p:nvPicPr>
+        <p:blipFill>
+          <a:blip r:embed="rId4"/>
+          <a:stretch>
+            <a:fillRect/>
+          </a:stretch>
+        </p:blipFill>
+        <p:spPr>
+          <a:xfrm>
+            <a:off x="5101310" y="3584870"/>
+            <a:ext cx="3180244" cy="1641580"/>
+          </a:xfrm>
+          <a:prstGeom prst="rect">
+            <a:avLst/>
+          </a:prstGeom>
+        </p:spPr>
+      </p:pic>
     </p:spTree>
   </p:cSld>
   <p:clrMapOvr>
